--- a/ForumALTLINK.pptx
+++ b/ForumALTLINK.pptx
@@ -4,6 +4,12 @@
   <p:sldMasterIdLst>
     <p:sldMasterId id="2147483648" r:id="rId1"/>
   </p:sldMasterIdLst>
+  <p:sldIdLst>
+    <p:sldId id="256" r:id="rId2"/>
+    <p:sldId id="257" r:id="rId3"/>
+    <p:sldId id="258" r:id="rId4"/>
+    <p:sldId id="259" r:id="rId5"/>
+  </p:sldIdLst>
   <p:sldSz cx="9144000" cy="6858000" type="screen4x3"/>
   <p:notesSz cx="6858000" cy="9144000"/>
   <p:defaultTextStyle>
@@ -285,7 +291,7 @@
           <a:p>
             <a:fld id="{B4C71EC6-210F-42DE-9C53-41977AD35B3D}" type="datetimeFigureOut">
               <a:rPr lang="ru-RU" smtClean="0"/>
-              <a:t>12.11.2009</a:t>
+              <a:t>15.05.2026</a:t>
             </a:fld>
             <a:endParaRPr lang="ru-RU"/>
           </a:p>
@@ -450,7 +456,7 @@
           <a:p>
             <a:fld id="{B4C71EC6-210F-42DE-9C53-41977AD35B3D}" type="datetimeFigureOut">
               <a:rPr lang="ru-RU" smtClean="0"/>
-              <a:t>12.11.2009</a:t>
+              <a:t>15.05.2026</a:t>
             </a:fld>
             <a:endParaRPr lang="ru-RU"/>
           </a:p>
@@ -625,7 +631,7 @@
           <a:p>
             <a:fld id="{B4C71EC6-210F-42DE-9C53-41977AD35B3D}" type="datetimeFigureOut">
               <a:rPr lang="ru-RU" smtClean="0"/>
-              <a:t>12.11.2009</a:t>
+              <a:t>15.05.2026</a:t>
             </a:fld>
             <a:endParaRPr lang="ru-RU"/>
           </a:p>
@@ -790,7 +796,7 @@
           <a:p>
             <a:fld id="{B4C71EC6-210F-42DE-9C53-41977AD35B3D}" type="datetimeFigureOut">
               <a:rPr lang="ru-RU" smtClean="0"/>
-              <a:t>12.11.2009</a:t>
+              <a:t>15.05.2026</a:t>
             </a:fld>
             <a:endParaRPr lang="ru-RU"/>
           </a:p>
@@ -1031,7 +1037,7 @@
           <a:p>
             <a:fld id="{B4C71EC6-210F-42DE-9C53-41977AD35B3D}" type="datetimeFigureOut">
               <a:rPr lang="ru-RU" smtClean="0"/>
-              <a:t>12.11.2009</a:t>
+              <a:t>15.05.2026</a:t>
             </a:fld>
             <a:endParaRPr lang="ru-RU"/>
           </a:p>
@@ -1314,7 +1320,7 @@
           <a:p>
             <a:fld id="{B4C71EC6-210F-42DE-9C53-41977AD35B3D}" type="datetimeFigureOut">
               <a:rPr lang="ru-RU" smtClean="0"/>
-              <a:t>12.11.2009</a:t>
+              <a:t>15.05.2026</a:t>
             </a:fld>
             <a:endParaRPr lang="ru-RU"/>
           </a:p>
@@ -1731,7 +1737,7 @@
           <a:p>
             <a:fld id="{B4C71EC6-210F-42DE-9C53-41977AD35B3D}" type="datetimeFigureOut">
               <a:rPr lang="ru-RU" smtClean="0"/>
-              <a:t>12.11.2009</a:t>
+              <a:t>15.05.2026</a:t>
             </a:fld>
             <a:endParaRPr lang="ru-RU"/>
           </a:p>
@@ -1844,7 +1850,7 @@
           <a:p>
             <a:fld id="{B4C71EC6-210F-42DE-9C53-41977AD35B3D}" type="datetimeFigureOut">
               <a:rPr lang="ru-RU" smtClean="0"/>
-              <a:t>12.11.2009</a:t>
+              <a:t>15.05.2026</a:t>
             </a:fld>
             <a:endParaRPr lang="ru-RU"/>
           </a:p>
@@ -1934,7 +1940,7 @@
           <a:p>
             <a:fld id="{B4C71EC6-210F-42DE-9C53-41977AD35B3D}" type="datetimeFigureOut">
               <a:rPr lang="ru-RU" smtClean="0"/>
-              <a:t>12.11.2009</a:t>
+              <a:t>15.05.2026</a:t>
             </a:fld>
             <a:endParaRPr lang="ru-RU"/>
           </a:p>
@@ -2206,7 +2212,7 @@
           <a:p>
             <a:fld id="{B4C71EC6-210F-42DE-9C53-41977AD35B3D}" type="datetimeFigureOut">
               <a:rPr lang="ru-RU" smtClean="0"/>
-              <a:t>12.11.2009</a:t>
+              <a:t>15.05.2026</a:t>
             </a:fld>
             <a:endParaRPr lang="ru-RU"/>
           </a:p>
@@ -2454,7 +2460,7 @@
           <a:p>
             <a:fld id="{B4C71EC6-210F-42DE-9C53-41977AD35B3D}" type="datetimeFigureOut">
               <a:rPr lang="ru-RU" smtClean="0"/>
-              <a:t>12.11.2009</a:t>
+              <a:t>15.05.2026</a:t>
             </a:fld>
             <a:endParaRPr lang="ru-RU"/>
           </a:p>
@@ -2662,7 +2668,7 @@
           <a:p>
             <a:fld id="{B4C71EC6-210F-42DE-9C53-41977AD35B3D}" type="datetimeFigureOut">
               <a:rPr lang="ru-RU" smtClean="0"/>
-              <a:t>12.11.2009</a:t>
+              <a:t>15.05.2026</a:t>
             </a:fld>
             <a:endParaRPr lang="ru-RU"/>
           </a:p>
@@ -3015,45 +3021,1016 @@
 </p:sldMaster>
 </file>
 
+<file path=ppt/slides/slide1.xml><?xml version="1.0" encoding="utf-8"?>
+<p:sld xmlns:a="http://schemas.openxmlformats.org/drawingml/2006/main" xmlns:r="http://schemas.openxmlformats.org/officeDocument/2006/relationships" xmlns:p="http://schemas.openxmlformats.org/presentationml/2006/main">
+  <p:cSld>
+    <p:spTree>
+      <p:nvGrpSpPr>
+        <p:cNvPr id="1" name=""/>
+        <p:cNvGrpSpPr/>
+        <p:nvPr/>
+      </p:nvGrpSpPr>
+      <p:grpSpPr>
+        <a:xfrm>
+          <a:off x="0" y="0"/>
+          <a:ext cx="0" cy="0"/>
+          <a:chOff x="0" y="0"/>
+          <a:chExt cx="0" cy="0"/>
+        </a:xfrm>
+      </p:grpSpPr>
+      <p:pic>
+        <p:nvPicPr>
+          <p:cNvPr id="1026" name="Picture 2" descr="C:\Users\konst\Documents\GitHub\ALTLINK-VPN\media\background.png"/>
+          <p:cNvPicPr>
+            <a:picLocks noChangeAspect="1" noChangeArrowheads="1"/>
+          </p:cNvPicPr>
+          <p:nvPr/>
+        </p:nvPicPr>
+        <p:blipFill>
+          <a:blip r:embed="rId2">
+            <a:extLst>
+              <a:ext uri="{28A0092B-C50C-407E-A947-70E740481C1C}">
+                <a14:useLocalDpi xmlns:a14="http://schemas.microsoft.com/office/drawing/2010/main" val="0"/>
+              </a:ext>
+            </a:extLst>
+          </a:blip>
+          <a:srcRect/>
+          <a:stretch>
+            <a:fillRect/>
+          </a:stretch>
+        </p:blipFill>
+        <p:spPr bwMode="auto">
+          <a:xfrm>
+            <a:off x="-618105" y="-99392"/>
+            <a:ext cx="10176676" cy="7200800"/>
+          </a:xfrm>
+          <a:prstGeom prst="rect">
+            <a:avLst/>
+          </a:prstGeom>
+          <a:noFill/>
+          <a:extLst>
+            <a:ext uri="{909E8E84-426E-40DD-AFC4-6F175D3DCCD1}">
+              <a14:hiddenFill xmlns:a14="http://schemas.microsoft.com/office/drawing/2010/main">
+                <a:solidFill>
+                  <a:srgbClr val="FFFFFF"/>
+                </a:solidFill>
+              </a14:hiddenFill>
+            </a:ext>
+          </a:extLst>
+        </p:spPr>
+      </p:pic>
+      <p:sp>
+        <p:nvSpPr>
+          <p:cNvPr id="2" name="Заголовок 1"/>
+          <p:cNvSpPr>
+            <a:spLocks noGrp="1"/>
+          </p:cNvSpPr>
+          <p:nvPr>
+            <p:ph type="ctrTitle"/>
+          </p:nvPr>
+        </p:nvSpPr>
+        <p:spPr>
+          <a:xfrm>
+            <a:off x="971600" y="2155588"/>
+            <a:ext cx="7772400" cy="1470025"/>
+          </a:xfrm>
+        </p:spPr>
+        <p:txBody>
+          <a:bodyPr>
+            <a:normAutofit/>
+          </a:bodyPr>
+          <a:lstStyle/>
+          <a:p>
+            <a:r>
+              <a:rPr lang="en-US" sz="5400" b="1" dirty="0" smtClean="0">
+                <a:latin typeface="Bahnschrift Light" pitchFamily="34" charset="0"/>
+              </a:rPr>
+              <a:t>Forum ALTLINK</a:t>
+            </a:r>
+            <a:endParaRPr lang="ru-RU" sz="5400" b="1" dirty="0">
+              <a:latin typeface="Bahnschrift Light" pitchFamily="34" charset="0"/>
+            </a:endParaRPr>
+          </a:p>
+        </p:txBody>
+      </p:sp>
+      <p:sp>
+        <p:nvSpPr>
+          <p:cNvPr id="3" name="Подзаголовок 2"/>
+          <p:cNvSpPr>
+            <a:spLocks noGrp="1"/>
+          </p:cNvSpPr>
+          <p:nvPr>
+            <p:ph type="subTitle" idx="1"/>
+          </p:nvPr>
+        </p:nvSpPr>
+        <p:spPr/>
+        <p:txBody>
+          <a:bodyPr/>
+          <a:lstStyle/>
+          <a:p>
+            <a:r>
+              <a:rPr lang="ru-RU" dirty="0" smtClean="0"/>
+              <a:t> </a:t>
+            </a:r>
+            <a:endParaRPr lang="ru-RU" dirty="0"/>
+          </a:p>
+        </p:txBody>
+      </p:sp>
+      <p:pic>
+        <p:nvPicPr>
+          <p:cNvPr id="1027" name="Picture 3" descr="C:\Users\konst\Documents\GitHub\ALTLINK-VPN\media\altlink icon.png"/>
+          <p:cNvPicPr>
+            <a:picLocks noChangeAspect="1" noChangeArrowheads="1"/>
+          </p:cNvPicPr>
+          <p:nvPr/>
+        </p:nvPicPr>
+        <p:blipFill>
+          <a:blip r:embed="rId3" cstate="print">
+            <a:extLst>
+              <a:ext uri="{28A0092B-C50C-407E-A947-70E740481C1C}">
+                <a14:useLocalDpi xmlns:a14="http://schemas.microsoft.com/office/drawing/2010/main" val="0"/>
+              </a:ext>
+            </a:extLst>
+          </a:blip>
+          <a:srcRect/>
+          <a:stretch>
+            <a:fillRect/>
+          </a:stretch>
+        </p:blipFill>
+        <p:spPr bwMode="auto">
+          <a:xfrm>
+            <a:off x="1422055" y="2492896"/>
+            <a:ext cx="900100" cy="807846"/>
+          </a:xfrm>
+          <a:prstGeom prst="rect">
+            <a:avLst/>
+          </a:prstGeom>
+          <a:noFill/>
+          <a:extLst>
+            <a:ext uri="{909E8E84-426E-40DD-AFC4-6F175D3DCCD1}">
+              <a14:hiddenFill xmlns:a14="http://schemas.microsoft.com/office/drawing/2010/main">
+                <a:solidFill>
+                  <a:srgbClr val="FFFFFF"/>
+                </a:solidFill>
+              </a14:hiddenFill>
+            </a:ext>
+          </a:extLst>
+        </p:spPr>
+      </p:pic>
+      <p:pic>
+        <p:nvPicPr>
+          <p:cNvPr id="1029" name="Picture 5"/>
+          <p:cNvPicPr>
+            <a:picLocks noChangeAspect="1" noChangeArrowheads="1"/>
+          </p:cNvPicPr>
+          <p:nvPr/>
+        </p:nvPicPr>
+        <p:blipFill>
+          <a:blip r:embed="rId4" cstate="print">
+            <a:extLst>
+              <a:ext uri="{28A0092B-C50C-407E-A947-70E740481C1C}">
+                <a14:useLocalDpi xmlns:a14="http://schemas.microsoft.com/office/drawing/2010/main" val="0"/>
+              </a:ext>
+            </a:extLst>
+          </a:blip>
+          <a:srcRect/>
+          <a:stretch>
+            <a:fillRect/>
+          </a:stretch>
+        </p:blipFill>
+        <p:spPr bwMode="auto">
+          <a:xfrm>
+            <a:off x="5940152" y="4221088"/>
+            <a:ext cx="2088232" cy="2519684"/>
+          </a:xfrm>
+          <a:prstGeom prst="rect">
+            <a:avLst/>
+          </a:prstGeom>
+          <a:noFill/>
+          <a:ln>
+            <a:noFill/>
+          </a:ln>
+          <a:effectLst/>
+          <a:extLst>
+            <a:ext uri="{909E8E84-426E-40DD-AFC4-6F175D3DCCD1}">
+              <a14:hiddenFill xmlns:a14="http://schemas.microsoft.com/office/drawing/2010/main">
+                <a:solidFill>
+                  <a:schemeClr val="accent1"/>
+                </a:solidFill>
+              </a14:hiddenFill>
+            </a:ext>
+            <a:ext uri="{91240B29-F687-4F45-9708-019B960494DF}">
+              <a14:hiddenLine xmlns:a14="http://schemas.microsoft.com/office/drawing/2010/main" w="9525">
+                <a:solidFill>
+                  <a:schemeClr val="tx1"/>
+                </a:solidFill>
+                <a:miter lim="800000"/>
+                <a:headEnd/>
+                <a:tailEnd/>
+              </a14:hiddenLine>
+            </a:ext>
+            <a:ext uri="{AF507438-7753-43E0-B8FC-AC1667EBCBE1}">
+              <a14:hiddenEffects xmlns:a14="http://schemas.microsoft.com/office/drawing/2010/main">
+                <a:effectLst>
+                  <a:outerShdw dist="35921" dir="2700000" algn="ctr" rotWithShape="0">
+                    <a:schemeClr val="bg2"/>
+                  </a:outerShdw>
+                </a:effectLst>
+              </a14:hiddenEffects>
+            </a:ext>
+          </a:extLst>
+        </p:spPr>
+      </p:pic>
+    </p:spTree>
+    <p:extLst>
+      <p:ext uri="{BB962C8B-B14F-4D97-AF65-F5344CB8AC3E}">
+        <p14:creationId xmlns:p14="http://schemas.microsoft.com/office/powerpoint/2010/main" val="354436176"/>
+      </p:ext>
+    </p:extLst>
+  </p:cSld>
+  <p:clrMapOvr>
+    <a:masterClrMapping/>
+  </p:clrMapOvr>
+</p:sld>
+</file>
+
+<file path=ppt/slides/slide2.xml><?xml version="1.0" encoding="utf-8"?>
+<p:sld xmlns:a="http://schemas.openxmlformats.org/drawingml/2006/main" xmlns:r="http://schemas.openxmlformats.org/officeDocument/2006/relationships" xmlns:p="http://schemas.openxmlformats.org/presentationml/2006/main">
+  <p:cSld>
+    <p:spTree>
+      <p:nvGrpSpPr>
+        <p:cNvPr id="1" name=""/>
+        <p:cNvGrpSpPr/>
+        <p:nvPr/>
+      </p:nvGrpSpPr>
+      <p:grpSpPr>
+        <a:xfrm>
+          <a:off x="0" y="0"/>
+          <a:ext cx="0" cy="0"/>
+          <a:chOff x="0" y="0"/>
+          <a:chExt cx="0" cy="0"/>
+        </a:xfrm>
+      </p:grpSpPr>
+      <p:pic>
+        <p:nvPicPr>
+          <p:cNvPr id="6" name="Picture 2" descr="C:\Users\konst\Documents\GitHub\ALTLINK-VPN\media\background.png"/>
+          <p:cNvPicPr>
+            <a:picLocks noChangeAspect="1" noChangeArrowheads="1"/>
+          </p:cNvPicPr>
+          <p:nvPr/>
+        </p:nvPicPr>
+        <p:blipFill>
+          <a:blip r:embed="rId2">
+            <a:extLst>
+              <a:ext uri="{28A0092B-C50C-407E-A947-70E740481C1C}">
+                <a14:useLocalDpi xmlns:a14="http://schemas.microsoft.com/office/drawing/2010/main" val="0"/>
+              </a:ext>
+            </a:extLst>
+          </a:blip>
+          <a:srcRect/>
+          <a:stretch>
+            <a:fillRect/>
+          </a:stretch>
+        </p:blipFill>
+        <p:spPr bwMode="auto">
+          <a:xfrm>
+            <a:off x="-618105" y="-99392"/>
+            <a:ext cx="10176676" cy="7200800"/>
+          </a:xfrm>
+          <a:prstGeom prst="rect">
+            <a:avLst/>
+          </a:prstGeom>
+          <a:noFill/>
+          <a:extLst>
+            <a:ext uri="{909E8E84-426E-40DD-AFC4-6F175D3DCCD1}">
+              <a14:hiddenFill xmlns:a14="http://schemas.microsoft.com/office/drawing/2010/main">
+                <a:solidFill>
+                  <a:srgbClr val="FFFFFF"/>
+                </a:solidFill>
+              </a14:hiddenFill>
+            </a:ext>
+          </a:extLst>
+        </p:spPr>
+      </p:pic>
+      <p:sp>
+        <p:nvSpPr>
+          <p:cNvPr id="2" name="Заголовок 1"/>
+          <p:cNvSpPr>
+            <a:spLocks noGrp="1"/>
+          </p:cNvSpPr>
+          <p:nvPr>
+            <p:ph type="title"/>
+          </p:nvPr>
+        </p:nvSpPr>
+        <p:spPr/>
+        <p:txBody>
+          <a:bodyPr/>
+          <a:lstStyle/>
+          <a:p>
+            <a:endParaRPr lang="ru-RU"/>
+          </a:p>
+        </p:txBody>
+      </p:sp>
+      <p:sp>
+        <p:nvSpPr>
+          <p:cNvPr id="5" name="Объект 4"/>
+          <p:cNvSpPr>
+            <a:spLocks noGrp="1"/>
+          </p:cNvSpPr>
+          <p:nvPr>
+            <p:ph idx="1"/>
+          </p:nvPr>
+        </p:nvSpPr>
+        <p:spPr/>
+        <p:txBody>
+          <a:bodyPr>
+            <a:normAutofit fontScale="70000" lnSpcReduction="20000"/>
+          </a:bodyPr>
+          <a:lstStyle/>
+          <a:p>
+            <a:r>
+              <a:rPr lang="ru-RU" dirty="0"/>
+              <a:t>- Главная страница форума на `</a:t>
+            </a:r>
+            <a:r>
+              <a:rPr lang="ru-RU" dirty="0" err="1"/>
+              <a:t>Flask</a:t>
+            </a:r>
+            <a:r>
+              <a:rPr lang="ru-RU" dirty="0"/>
+              <a:t>`</a:t>
+            </a:r>
+          </a:p>
+          <a:p>
+            <a:r>
+              <a:rPr lang="ru-RU" dirty="0"/>
+              <a:t>- Регистрация аккаунта с `</a:t>
+            </a:r>
+            <a:r>
+              <a:rPr lang="ru-RU" dirty="0" err="1"/>
+              <a:t>nickname</a:t>
+            </a:r>
+            <a:r>
+              <a:rPr lang="ru-RU" dirty="0"/>
+              <a:t>`, паролем, подтверждением пароля, полом и загрузкой </a:t>
+            </a:r>
+            <a:r>
+              <a:rPr lang="ru-RU" dirty="0" err="1"/>
+              <a:t>аватарки</a:t>
+            </a:r>
+            <a:endParaRPr lang="ru-RU" dirty="0"/>
+          </a:p>
+          <a:p>
+            <a:r>
+              <a:rPr lang="ru-RU" dirty="0"/>
+              <a:t>- Отдельная страница профиля пользователя</a:t>
+            </a:r>
+          </a:p>
+          <a:p>
+            <a:r>
+              <a:rPr lang="ru-RU" dirty="0"/>
+              <a:t>- ORM-модель `</a:t>
+            </a:r>
+            <a:r>
+              <a:rPr lang="ru-RU" dirty="0" err="1"/>
+              <a:t>User</a:t>
+            </a:r>
+            <a:r>
+              <a:rPr lang="ru-RU" dirty="0"/>
+              <a:t>` через `</a:t>
+            </a:r>
+            <a:r>
+              <a:rPr lang="ru-RU" dirty="0" err="1"/>
+              <a:t>Flask-SQLAlchemy</a:t>
+            </a:r>
+            <a:r>
+              <a:rPr lang="ru-RU" dirty="0"/>
+              <a:t>`</a:t>
+            </a:r>
+          </a:p>
+          <a:p>
+            <a:r>
+              <a:rPr lang="ru-RU" dirty="0"/>
+              <a:t>- Работа с контекстом текущего пользователя через сессии </a:t>
+            </a:r>
+            <a:r>
+              <a:rPr lang="ru-RU" dirty="0" err="1"/>
+              <a:t>Flask</a:t>
+            </a:r>
+            <a:r>
+              <a:rPr lang="ru-RU" dirty="0"/>
+              <a:t> и `</a:t>
+            </a:r>
+            <a:r>
+              <a:rPr lang="ru-RU" dirty="0" err="1"/>
+              <a:t>g.current_user</a:t>
+            </a:r>
+            <a:r>
+              <a:rPr lang="ru-RU" dirty="0"/>
+              <a:t>`</a:t>
+            </a:r>
+          </a:p>
+          <a:p>
+            <a:r>
+              <a:rPr lang="ru-RU" dirty="0"/>
+              <a:t>- Темы форума и сообщения пользователей внутри тем</a:t>
+            </a:r>
+          </a:p>
+          <a:p>
+            <a:r>
+              <a:rPr lang="ru-RU" dirty="0"/>
+              <a:t>- Загрузка </a:t>
+            </a:r>
+            <a:r>
+              <a:rPr lang="ru-RU" dirty="0" err="1"/>
+              <a:t>аватарки</a:t>
+            </a:r>
+            <a:r>
+              <a:rPr lang="ru-RU" dirty="0"/>
+              <a:t> пользователя (только изображения)</a:t>
+            </a:r>
+          </a:p>
+          <a:p>
+            <a:r>
+              <a:rPr lang="ru-RU" dirty="0"/>
+              <a:t>- Локальная база `</a:t>
+            </a:r>
+            <a:r>
+              <a:rPr lang="ru-RU" dirty="0" err="1"/>
+              <a:t>SQLite</a:t>
+            </a:r>
+            <a:r>
+              <a:rPr lang="ru-RU" dirty="0"/>
+              <a:t>`</a:t>
+            </a:r>
+          </a:p>
+          <a:p>
+            <a:r>
+              <a:rPr lang="ru-RU" dirty="0"/>
+              <a:t>- Дефолтная </a:t>
+            </a:r>
+            <a:r>
+              <a:rPr lang="ru-RU" dirty="0" err="1"/>
+              <a:t>аватарка</a:t>
+            </a:r>
+            <a:r>
+              <a:rPr lang="ru-RU" dirty="0"/>
+              <a:t> из папки `</a:t>
+            </a:r>
+            <a:r>
+              <a:rPr lang="ru-RU" dirty="0" err="1"/>
+              <a:t>media</a:t>
+            </a:r>
+            <a:r>
+              <a:rPr lang="ru-RU" dirty="0"/>
+              <a:t>`, если пользователь не загрузил свою</a:t>
+            </a:r>
+          </a:p>
+          <a:p>
+            <a:r>
+              <a:rPr lang="ru-RU" dirty="0"/>
+              <a:t>- Автоответ Поддержки ALTLINK через `</a:t>
+            </a:r>
+            <a:r>
+              <a:rPr lang="ru-RU" dirty="0" err="1"/>
+              <a:t>Gemini</a:t>
+            </a:r>
+            <a:r>
+              <a:rPr lang="ru-RU" dirty="0"/>
+              <a:t>` в теме `Проблемы и решения`</a:t>
+            </a:r>
+          </a:p>
+          <a:p>
+            <a:endParaRPr lang="ru-RU" dirty="0"/>
+          </a:p>
+        </p:txBody>
+      </p:sp>
+    </p:spTree>
+    <p:extLst>
+      <p:ext uri="{BB962C8B-B14F-4D97-AF65-F5344CB8AC3E}">
+        <p14:creationId xmlns:p14="http://schemas.microsoft.com/office/powerpoint/2010/main" val="1033171548"/>
+      </p:ext>
+    </p:extLst>
+  </p:cSld>
+  <p:clrMapOvr>
+    <a:masterClrMapping/>
+  </p:clrMapOvr>
+</p:sld>
+</file>
+
+<file path=ppt/slides/slide3.xml><?xml version="1.0" encoding="utf-8"?>
+<p:sld xmlns:a="http://schemas.openxmlformats.org/drawingml/2006/main" xmlns:r="http://schemas.openxmlformats.org/officeDocument/2006/relationships" xmlns:p="http://schemas.openxmlformats.org/presentationml/2006/main">
+  <p:cSld>
+    <p:spTree>
+      <p:nvGrpSpPr>
+        <p:cNvPr id="1" name=""/>
+        <p:cNvGrpSpPr/>
+        <p:nvPr/>
+      </p:nvGrpSpPr>
+      <p:grpSpPr>
+        <a:xfrm>
+          <a:off x="0" y="0"/>
+          <a:ext cx="0" cy="0"/>
+          <a:chOff x="0" y="0"/>
+          <a:chExt cx="0" cy="0"/>
+        </a:xfrm>
+      </p:grpSpPr>
+      <p:pic>
+        <p:nvPicPr>
+          <p:cNvPr id="4" name="Picture 2" descr="C:\Users\konst\Documents\GitHub\ALTLINK-VPN\media\background.png"/>
+          <p:cNvPicPr>
+            <a:picLocks noChangeAspect="1" noChangeArrowheads="1"/>
+          </p:cNvPicPr>
+          <p:nvPr/>
+        </p:nvPicPr>
+        <p:blipFill>
+          <a:blip r:embed="rId2">
+            <a:extLst>
+              <a:ext uri="{28A0092B-C50C-407E-A947-70E740481C1C}">
+                <a14:useLocalDpi xmlns:a14="http://schemas.microsoft.com/office/drawing/2010/main" val="0"/>
+              </a:ext>
+            </a:extLst>
+          </a:blip>
+          <a:srcRect/>
+          <a:stretch>
+            <a:fillRect/>
+          </a:stretch>
+        </p:blipFill>
+        <p:spPr bwMode="auto">
+          <a:xfrm>
+            <a:off x="-618105" y="-99392"/>
+            <a:ext cx="10176676" cy="7200800"/>
+          </a:xfrm>
+          <a:prstGeom prst="rect">
+            <a:avLst/>
+          </a:prstGeom>
+          <a:noFill/>
+          <a:extLst>
+            <a:ext uri="{909E8E84-426E-40DD-AFC4-6F175D3DCCD1}">
+              <a14:hiddenFill xmlns:a14="http://schemas.microsoft.com/office/drawing/2010/main">
+                <a:solidFill>
+                  <a:srgbClr val="FFFFFF"/>
+                </a:solidFill>
+              </a14:hiddenFill>
+            </a:ext>
+          </a:extLst>
+        </p:spPr>
+      </p:pic>
+      <p:sp>
+        <p:nvSpPr>
+          <p:cNvPr id="2" name="Заголовок 1"/>
+          <p:cNvSpPr>
+            <a:spLocks noGrp="1"/>
+          </p:cNvSpPr>
+          <p:nvPr>
+            <p:ph type="title"/>
+          </p:nvPr>
+        </p:nvSpPr>
+        <p:spPr/>
+        <p:txBody>
+          <a:bodyPr>
+            <a:normAutofit/>
+          </a:bodyPr>
+          <a:lstStyle/>
+          <a:p>
+            <a:r>
+              <a:rPr lang="ru-RU" dirty="0" smtClean="0"/>
+              <a:t>Технологии</a:t>
+            </a:r>
+            <a:endParaRPr lang="ru-RU" dirty="0"/>
+          </a:p>
+        </p:txBody>
+      </p:sp>
+      <p:sp>
+        <p:nvSpPr>
+          <p:cNvPr id="3" name="Объект 2"/>
+          <p:cNvSpPr>
+            <a:spLocks noGrp="1"/>
+          </p:cNvSpPr>
+          <p:nvPr>
+            <p:ph idx="1"/>
+          </p:nvPr>
+        </p:nvSpPr>
+        <p:spPr/>
+        <p:txBody>
+          <a:bodyPr>
+            <a:normAutofit lnSpcReduction="10000"/>
+          </a:bodyPr>
+          <a:lstStyle/>
+          <a:p>
+            <a:r>
+              <a:rPr lang="en-US" dirty="0"/>
+              <a:t>- `Flask` — </a:t>
+            </a:r>
+            <a:r>
+              <a:rPr lang="ru-RU" dirty="0"/>
+              <a:t>веб-</a:t>
+            </a:r>
+            <a:r>
+              <a:rPr lang="ru-RU" dirty="0" err="1"/>
+              <a:t>фреймворк</a:t>
+            </a:r>
+            <a:r>
+              <a:rPr lang="ru-RU" dirty="0"/>
+              <a:t> для маршрутов, сессий и шаблонов.</a:t>
+            </a:r>
+          </a:p>
+          <a:p>
+            <a:r>
+              <a:rPr lang="ru-RU" dirty="0"/>
+              <a:t>- `</a:t>
+            </a:r>
+            <a:r>
+              <a:rPr lang="en-US" dirty="0"/>
+              <a:t>Flask-</a:t>
+            </a:r>
+            <a:r>
+              <a:rPr lang="en-US" dirty="0" err="1"/>
+              <a:t>SQLAlchemy</a:t>
+            </a:r>
+            <a:r>
+              <a:rPr lang="en-US" dirty="0"/>
+              <a:t>` — ORM </a:t>
+            </a:r>
+            <a:r>
+              <a:rPr lang="ru-RU" dirty="0"/>
+              <a:t>для работы с </a:t>
+            </a:r>
+            <a:r>
+              <a:rPr lang="en-US" dirty="0"/>
+              <a:t>SQLite.</a:t>
+            </a:r>
+          </a:p>
+          <a:p>
+            <a:r>
+              <a:rPr lang="en-US" dirty="0"/>
+              <a:t>- `SQLite` — </a:t>
+            </a:r>
+            <a:r>
+              <a:rPr lang="ru-RU" dirty="0"/>
+              <a:t>локальная база данных для пользователей, тем и сообщений.</a:t>
+            </a:r>
+          </a:p>
+          <a:p>
+            <a:r>
+              <a:rPr lang="ru-RU" dirty="0"/>
+              <a:t>- `</a:t>
+            </a:r>
+            <a:r>
+              <a:rPr lang="en-US" dirty="0"/>
+              <a:t>Jinja2` — </a:t>
+            </a:r>
+            <a:r>
+              <a:rPr lang="ru-RU" dirty="0" err="1"/>
+              <a:t>шаблонизатор</a:t>
+            </a:r>
+            <a:r>
+              <a:rPr lang="ru-RU" dirty="0"/>
+              <a:t> </a:t>
+            </a:r>
+            <a:r>
+              <a:rPr lang="en-US" dirty="0"/>
+              <a:t>HTML.</a:t>
+            </a:r>
+          </a:p>
+          <a:p>
+            <a:r>
+              <a:rPr lang="en-US" dirty="0"/>
+              <a:t>- `requests` — HTTP-</a:t>
+            </a:r>
+            <a:r>
+              <a:rPr lang="ru-RU" dirty="0"/>
+              <a:t>клиент для обращения к </a:t>
+            </a:r>
+            <a:r>
+              <a:rPr lang="en-US" dirty="0"/>
+              <a:t>Gemini API.</a:t>
+            </a:r>
+          </a:p>
+          <a:p>
+            <a:endParaRPr lang="ru-RU" dirty="0"/>
+          </a:p>
+        </p:txBody>
+      </p:sp>
+    </p:spTree>
+    <p:extLst>
+      <p:ext uri="{BB962C8B-B14F-4D97-AF65-F5344CB8AC3E}">
+        <p14:creationId xmlns:p14="http://schemas.microsoft.com/office/powerpoint/2010/main" val="4251402771"/>
+      </p:ext>
+    </p:extLst>
+  </p:cSld>
+  <p:clrMapOvr>
+    <a:masterClrMapping/>
+  </p:clrMapOvr>
+</p:sld>
+</file>
+
+<file path=ppt/slides/slide4.xml><?xml version="1.0" encoding="utf-8"?>
+<p:sld xmlns:a="http://schemas.openxmlformats.org/drawingml/2006/main" xmlns:r="http://schemas.openxmlformats.org/officeDocument/2006/relationships" xmlns:p="http://schemas.openxmlformats.org/presentationml/2006/main">
+  <p:cSld>
+    <p:spTree>
+      <p:nvGrpSpPr>
+        <p:cNvPr id="1" name=""/>
+        <p:cNvGrpSpPr/>
+        <p:nvPr/>
+      </p:nvGrpSpPr>
+      <p:grpSpPr>
+        <a:xfrm>
+          <a:off x="0" y="0"/>
+          <a:ext cx="0" cy="0"/>
+          <a:chOff x="0" y="0"/>
+          <a:chExt cx="0" cy="0"/>
+        </a:xfrm>
+      </p:grpSpPr>
+      <p:pic>
+        <p:nvPicPr>
+          <p:cNvPr id="10" name="Picture 2" descr="C:\Users\konst\Documents\GitHub\ALTLINK-VPN\media\background.png"/>
+          <p:cNvPicPr>
+            <a:picLocks noChangeAspect="1" noChangeArrowheads="1"/>
+          </p:cNvPicPr>
+          <p:nvPr/>
+        </p:nvPicPr>
+        <p:blipFill>
+          <a:blip r:embed="rId2">
+            <a:extLst>
+              <a:ext uri="{28A0092B-C50C-407E-A947-70E740481C1C}">
+                <a14:useLocalDpi xmlns:a14="http://schemas.microsoft.com/office/drawing/2010/main" val="0"/>
+              </a:ext>
+            </a:extLst>
+          </a:blip>
+          <a:srcRect/>
+          <a:stretch>
+            <a:fillRect/>
+          </a:stretch>
+        </p:blipFill>
+        <p:spPr bwMode="auto">
+          <a:xfrm>
+            <a:off x="-618105" y="-99392"/>
+            <a:ext cx="10176676" cy="7200800"/>
+          </a:xfrm>
+          <a:prstGeom prst="rect">
+            <a:avLst/>
+          </a:prstGeom>
+          <a:noFill/>
+          <a:extLst>
+            <a:ext uri="{909E8E84-426E-40DD-AFC4-6F175D3DCCD1}">
+              <a14:hiddenFill xmlns:a14="http://schemas.microsoft.com/office/drawing/2010/main">
+                <a:solidFill>
+                  <a:srgbClr val="FFFFFF"/>
+                </a:solidFill>
+              </a14:hiddenFill>
+            </a:ext>
+          </a:extLst>
+        </p:spPr>
+      </p:pic>
+      <p:sp>
+        <p:nvSpPr>
+          <p:cNvPr id="2" name="Заголовок 1"/>
+          <p:cNvSpPr>
+            <a:spLocks noGrp="1"/>
+          </p:cNvSpPr>
+          <p:nvPr>
+            <p:ph type="title"/>
+          </p:nvPr>
+        </p:nvSpPr>
+        <p:spPr/>
+        <p:txBody>
+          <a:bodyPr/>
+          <a:lstStyle/>
+          <a:p>
+            <a:endParaRPr lang="ru-RU"/>
+          </a:p>
+        </p:txBody>
+      </p:sp>
+      <p:sp>
+        <p:nvSpPr>
+          <p:cNvPr id="3" name="Объект 2"/>
+          <p:cNvSpPr>
+            <a:spLocks noGrp="1"/>
+          </p:cNvSpPr>
+          <p:nvPr>
+            <p:ph idx="1"/>
+          </p:nvPr>
+        </p:nvSpPr>
+        <p:spPr/>
+        <p:txBody>
+          <a:bodyPr/>
+          <a:lstStyle/>
+          <a:p>
+            <a:endParaRPr lang="ru-RU" dirty="0"/>
+          </a:p>
+        </p:txBody>
+      </p:sp>
+      <p:sp>
+        <p:nvSpPr>
+          <p:cNvPr id="4" name="AutoShape 2" descr="QR preview"/>
+          <p:cNvSpPr>
+            <a:spLocks noChangeAspect="1" noChangeArrowheads="1"/>
+          </p:cNvSpPr>
+          <p:nvPr/>
+        </p:nvSpPr>
+        <p:spPr bwMode="auto">
+          <a:xfrm>
+            <a:off x="155575" y="-144463"/>
+            <a:ext cx="304800" cy="304801"/>
+          </a:xfrm>
+          <a:prstGeom prst="rect">
+            <a:avLst/>
+          </a:prstGeom>
+          <a:noFill/>
+          <a:extLst>
+            <a:ext uri="{909E8E84-426E-40DD-AFC4-6F175D3DCCD1}">
+              <a14:hiddenFill xmlns:a14="http://schemas.microsoft.com/office/drawing/2010/main">
+                <a:solidFill>
+                  <a:srgbClr val="FFFFFF"/>
+                </a:solidFill>
+              </a14:hiddenFill>
+            </a:ext>
+          </a:extLst>
+        </p:spPr>
+        <p:txBody>
+          <a:bodyPr vert="horz" wrap="square" lIns="91440" tIns="45720" rIns="91440" bIns="45720" numCol="1" anchor="t" anchorCtr="0" compatLnSpc="1">
+            <a:prstTxWarp prst="textNoShape">
+              <a:avLst/>
+            </a:prstTxWarp>
+          </a:bodyPr>
+          <a:lstStyle/>
+          <a:p>
+            <a:endParaRPr lang="ru-RU"/>
+          </a:p>
+        </p:txBody>
+      </p:sp>
+      <p:sp>
+        <p:nvSpPr>
+          <p:cNvPr id="5" name="AutoShape 4" descr="QR preview"/>
+          <p:cNvSpPr>
+            <a:spLocks noChangeAspect="1" noChangeArrowheads="1"/>
+          </p:cNvSpPr>
+          <p:nvPr/>
+        </p:nvSpPr>
+        <p:spPr bwMode="auto">
+          <a:xfrm>
+            <a:off x="307975" y="7937"/>
+            <a:ext cx="304800" cy="304801"/>
+          </a:xfrm>
+          <a:prstGeom prst="rect">
+            <a:avLst/>
+          </a:prstGeom>
+          <a:noFill/>
+          <a:extLst>
+            <a:ext uri="{909E8E84-426E-40DD-AFC4-6F175D3DCCD1}">
+              <a14:hiddenFill xmlns:a14="http://schemas.microsoft.com/office/drawing/2010/main">
+                <a:solidFill>
+                  <a:srgbClr val="FFFFFF"/>
+                </a:solidFill>
+              </a14:hiddenFill>
+            </a:ext>
+          </a:extLst>
+        </p:spPr>
+        <p:txBody>
+          <a:bodyPr vert="horz" wrap="square" lIns="91440" tIns="45720" rIns="91440" bIns="45720" numCol="1" anchor="t" anchorCtr="0" compatLnSpc="1">
+            <a:prstTxWarp prst="textNoShape">
+              <a:avLst/>
+            </a:prstTxWarp>
+          </a:bodyPr>
+          <a:lstStyle/>
+          <a:p>
+            <a:endParaRPr lang="ru-RU"/>
+          </a:p>
+        </p:txBody>
+      </p:sp>
+      <p:sp>
+        <p:nvSpPr>
+          <p:cNvPr id="6" name="AutoShape 6" descr="QR preview"/>
+          <p:cNvSpPr>
+            <a:spLocks noChangeAspect="1" noChangeArrowheads="1"/>
+          </p:cNvSpPr>
+          <p:nvPr/>
+        </p:nvSpPr>
+        <p:spPr bwMode="auto">
+          <a:xfrm>
+            <a:off x="460375" y="160337"/>
+            <a:ext cx="304800" cy="304801"/>
+          </a:xfrm>
+          <a:prstGeom prst="rect">
+            <a:avLst/>
+          </a:prstGeom>
+          <a:noFill/>
+          <a:extLst>
+            <a:ext uri="{909E8E84-426E-40DD-AFC4-6F175D3DCCD1}">
+              <a14:hiddenFill xmlns:a14="http://schemas.microsoft.com/office/drawing/2010/main">
+                <a:solidFill>
+                  <a:srgbClr val="FFFFFF"/>
+                </a:solidFill>
+              </a14:hiddenFill>
+            </a:ext>
+          </a:extLst>
+        </p:spPr>
+        <p:txBody>
+          <a:bodyPr vert="horz" wrap="square" lIns="91440" tIns="45720" rIns="91440" bIns="45720" numCol="1" anchor="t" anchorCtr="0" compatLnSpc="1">
+            <a:prstTxWarp prst="textNoShape">
+              <a:avLst/>
+            </a:prstTxWarp>
+          </a:bodyPr>
+          <a:lstStyle/>
+          <a:p>
+            <a:endParaRPr lang="ru-RU"/>
+          </a:p>
+        </p:txBody>
+      </p:sp>
+      <p:pic>
+        <p:nvPicPr>
+          <p:cNvPr id="2056" name="Picture 8" descr="http://qrcoder.ru/code/?http%3A%2F%2Fforum.altlink.online%2F&amp;4&amp;0"/>
+          <p:cNvPicPr>
+            <a:picLocks noChangeAspect="1" noChangeArrowheads="1"/>
+          </p:cNvPicPr>
+          <p:nvPr/>
+        </p:nvPicPr>
+        <p:blipFill>
+          <a:blip r:embed="rId3">
+            <a:extLst>
+              <a:ext uri="{28A0092B-C50C-407E-A947-70E740481C1C}">
+                <a14:useLocalDpi xmlns:a14="http://schemas.microsoft.com/office/drawing/2010/main" val="0"/>
+              </a:ext>
+            </a:extLst>
+          </a:blip>
+          <a:srcRect/>
+          <a:stretch>
+            <a:fillRect/>
+          </a:stretch>
+        </p:blipFill>
+        <p:spPr bwMode="auto">
+          <a:xfrm>
+            <a:off x="1625917" y="548680"/>
+            <a:ext cx="5688632" cy="5688632"/>
+          </a:xfrm>
+          <a:prstGeom prst="rect">
+            <a:avLst/>
+          </a:prstGeom>
+          <a:noFill/>
+          <a:extLst>
+            <a:ext uri="{909E8E84-426E-40DD-AFC4-6F175D3DCCD1}">
+              <a14:hiddenFill xmlns:a14="http://schemas.microsoft.com/office/drawing/2010/main">
+                <a:solidFill>
+                  <a:srgbClr val="FFFFFF"/>
+                </a:solidFill>
+              </a14:hiddenFill>
+            </a:ext>
+          </a:extLst>
+        </p:spPr>
+      </p:pic>
+    </p:spTree>
+    <p:extLst>
+      <p:ext uri="{BB962C8B-B14F-4D97-AF65-F5344CB8AC3E}">
+        <p14:creationId xmlns:p14="http://schemas.microsoft.com/office/powerpoint/2010/main" val="4246362623"/>
+      </p:ext>
+    </p:extLst>
+  </p:cSld>
+  <p:clrMapOvr>
+    <a:masterClrMapping/>
+  </p:clrMapOvr>
+</p:sld>
+</file>
+
 <file path=ppt/theme/theme1.xml><?xml version="1.0" encoding="utf-8"?>
 <a:theme xmlns:a="http://schemas.openxmlformats.org/drawingml/2006/main" name="Тема Office">
   <a:themeElements>
-    <a:clrScheme name="Стандартная">
+    <a:clrScheme name="Другая 1">
       <a:dk1>
-        <a:sysClr val="windowText" lastClr="000000"/>
+        <a:srgbClr val="000000"/>
       </a:dk1>
       <a:lt1>
-        <a:sysClr val="window" lastClr="FFFFFF"/>
+        <a:srgbClr val="FFFFFF"/>
       </a:lt1>
       <a:dk2>
-        <a:srgbClr val="1F497D"/>
+        <a:srgbClr val="1F2123"/>
       </a:dk2>
       <a:lt2>
-        <a:srgbClr val="EEECE1"/>
+        <a:srgbClr val="00B050"/>
       </a:lt2>
       <a:accent1>
-        <a:srgbClr val="4F81BD"/>
+        <a:srgbClr val="7E97AD"/>
       </a:accent1>
       <a:accent2>
-        <a:srgbClr val="C0504D"/>
+        <a:srgbClr val="00B050"/>
       </a:accent2>
       <a:accent3>
-        <a:srgbClr val="9BBB59"/>
+        <a:srgbClr val="7A6A60"/>
       </a:accent3>
       <a:accent4>
-        <a:srgbClr val="8064A2"/>
+        <a:srgbClr val="73AF7A"/>
       </a:accent4>
       <a:accent5>
-        <a:srgbClr val="4BACC6"/>
+        <a:srgbClr val="67787B"/>
       </a:accent5>
       <a:accent6>
-        <a:srgbClr val="F79646"/>
+        <a:srgbClr val="6CA07D"/>
       </a:accent6>
       <a:hlink>
-        <a:srgbClr val="0000FF"/>
+        <a:srgbClr val="646464"/>
       </a:hlink>
       <a:folHlink>
-        <a:srgbClr val="800080"/>
+        <a:srgbClr val="969696"/>
       </a:folHlink>
     </a:clrScheme>
     <a:fontScheme name="Стандартная">
